--- a/public/videos/repositories/buyback-price-alert/buyback-price-alert-tech-preview.pptx
+++ b/public/videos/repositories/buyback-price-alert/buyback-price-alert-tech-preview.pptx
@@ -134,7 +134,7 @@
           <p:cNvPr id="2" name="タイトル 1">
             <a:extLst>
               <a:ext uri="{FF2B5EF4-FFF2-40B4-BE49-F238E27FC236}">
-                <a16:creationId xmlns:a16="http://schemas.microsoft.com/office/drawing/2014/main" id="{51E5A241-431A-AE3D-4CD1-F19CB2737BC9}"/>
+                <a16:creationId xmlns:a16="http://schemas.microsoft.com/office/drawing/2014/main" id="{73CF66D4-7B4B-AB34-EBCE-BB910A60663B}"/>
               </a:ext>
             </a:extLst>
           </p:cNvPr>
@@ -171,7 +171,7 @@
           <p:cNvPr id="3" name="字幕 2">
             <a:extLst>
               <a:ext uri="{FF2B5EF4-FFF2-40B4-BE49-F238E27FC236}">
-                <a16:creationId xmlns:a16="http://schemas.microsoft.com/office/drawing/2014/main" id="{3F387F2E-F48A-2496-94CE-79D4994B48BD}"/>
+                <a16:creationId xmlns:a16="http://schemas.microsoft.com/office/drawing/2014/main" id="{E85BCCCB-1248-70B2-7B34-0A1A71D16B01}"/>
               </a:ext>
             </a:extLst>
           </p:cNvPr>
@@ -241,7 +241,7 @@
           <p:cNvPr id="4" name="日付プレースホルダー 3">
             <a:extLst>
               <a:ext uri="{FF2B5EF4-FFF2-40B4-BE49-F238E27FC236}">
-                <a16:creationId xmlns:a16="http://schemas.microsoft.com/office/drawing/2014/main" id="{68339228-B8B8-920F-7B0D-19F1DF0D9C35}"/>
+                <a16:creationId xmlns:a16="http://schemas.microsoft.com/office/drawing/2014/main" id="{63C08E00-6A3A-39D6-27A3-BC0C6130FA7E}"/>
               </a:ext>
             </a:extLst>
           </p:cNvPr>
@@ -257,7 +257,7 @@
           <a:bodyPr/>
           <a:lstStyle/>
           <a:p>
-            <a:fld id="{896E1C1C-01C7-4CAE-AEC3-A01BE6B4FB87}" type="datetimeFigureOut">
+            <a:fld id="{E5263023-A351-4726-BFA0-A7895307A359}" type="datetimeFigureOut">
               <a:rPr kumimoji="1" lang="ja-JP" altLang="en-US" smtClean="0"/>
               <a:t>2026/7/30</a:t>
             </a:fld>
@@ -270,7 +270,7 @@
           <p:cNvPr id="5" name="フッター プレースホルダー 4">
             <a:extLst>
               <a:ext uri="{FF2B5EF4-FFF2-40B4-BE49-F238E27FC236}">
-                <a16:creationId xmlns:a16="http://schemas.microsoft.com/office/drawing/2014/main" id="{4CD90E16-3A15-21A2-D859-C9A2CBC3AEC9}"/>
+                <a16:creationId xmlns:a16="http://schemas.microsoft.com/office/drawing/2014/main" id="{4CC0937D-16FC-0673-96C5-CAE6A3AF1C8C}"/>
               </a:ext>
             </a:extLst>
           </p:cNvPr>
@@ -295,7 +295,7 @@
           <p:cNvPr id="6" name="スライド番号プレースホルダー 5">
             <a:extLst>
               <a:ext uri="{FF2B5EF4-FFF2-40B4-BE49-F238E27FC236}">
-                <a16:creationId xmlns:a16="http://schemas.microsoft.com/office/drawing/2014/main" id="{9D4AE269-13E5-C994-40B7-9E7FFF779A76}"/>
+                <a16:creationId xmlns:a16="http://schemas.microsoft.com/office/drawing/2014/main" id="{AF6DC21D-5CA1-4812-91BC-385DECBABCC3}"/>
               </a:ext>
             </a:extLst>
           </p:cNvPr>
@@ -311,7 +311,7 @@
           <a:bodyPr/>
           <a:lstStyle/>
           <a:p>
-            <a:fld id="{610A6627-C065-4D7D-9ACF-25BC5809B906}" type="slidenum">
+            <a:fld id="{7753DB9A-5EB3-43AD-B1F7-2D855E5F213B}" type="slidenum">
               <a:rPr kumimoji="1" lang="ja-JP" altLang="en-US" smtClean="0"/>
               <a:t>‹#›</a:t>
             </a:fld>
@@ -322,7 +322,7 @@
     </p:spTree>
     <p:extLst>
       <p:ext uri="{BB962C8B-B14F-4D97-AF65-F5344CB8AC3E}">
-        <p14:creationId xmlns:p14="http://schemas.microsoft.com/office/powerpoint/2010/main" val="3296122435"/>
+        <p14:creationId xmlns:p14="http://schemas.microsoft.com/office/powerpoint/2010/main" val="4281860617"/>
       </p:ext>
     </p:extLst>
   </p:cSld>
@@ -354,7 +354,7 @@
           <p:cNvPr id="2" name="タイトル 1">
             <a:extLst>
               <a:ext uri="{FF2B5EF4-FFF2-40B4-BE49-F238E27FC236}">
-                <a16:creationId xmlns:a16="http://schemas.microsoft.com/office/drawing/2014/main" id="{57194CEA-27A0-25BD-02A3-773890AFC885}"/>
+                <a16:creationId xmlns:a16="http://schemas.microsoft.com/office/drawing/2014/main" id="{5903FE24-E08E-BD70-D287-13AFFAC9B90D}"/>
               </a:ext>
             </a:extLst>
           </p:cNvPr>
@@ -382,7 +382,7 @@
           <p:cNvPr id="3" name="縦書きテキスト プレースホルダー 2">
             <a:extLst>
               <a:ext uri="{FF2B5EF4-FFF2-40B4-BE49-F238E27FC236}">
-                <a16:creationId xmlns:a16="http://schemas.microsoft.com/office/drawing/2014/main" id="{3D436FD3-3646-2CF4-805F-F40AECDD8FED}"/>
+                <a16:creationId xmlns:a16="http://schemas.microsoft.com/office/drawing/2014/main" id="{A526D1B0-D5DD-9D0C-2F5E-788A6C673ED9}"/>
               </a:ext>
             </a:extLst>
           </p:cNvPr>
@@ -471,7 +471,7 @@
           <p:cNvPr id="4" name="日付プレースホルダー 3">
             <a:extLst>
               <a:ext uri="{FF2B5EF4-FFF2-40B4-BE49-F238E27FC236}">
-                <a16:creationId xmlns:a16="http://schemas.microsoft.com/office/drawing/2014/main" id="{96C975D9-CDD9-E8BC-6879-5FD1931E7A04}"/>
+                <a16:creationId xmlns:a16="http://schemas.microsoft.com/office/drawing/2014/main" id="{95F67333-D878-656D-2A6E-24C6561F9DF8}"/>
               </a:ext>
             </a:extLst>
           </p:cNvPr>
@@ -487,7 +487,7 @@
           <a:bodyPr/>
           <a:lstStyle/>
           <a:p>
-            <a:fld id="{896E1C1C-01C7-4CAE-AEC3-A01BE6B4FB87}" type="datetimeFigureOut">
+            <a:fld id="{E5263023-A351-4726-BFA0-A7895307A359}" type="datetimeFigureOut">
               <a:rPr kumimoji="1" lang="ja-JP" altLang="en-US" smtClean="0"/>
               <a:t>2026/7/30</a:t>
             </a:fld>
@@ -500,7 +500,7 @@
           <p:cNvPr id="5" name="フッター プレースホルダー 4">
             <a:extLst>
               <a:ext uri="{FF2B5EF4-FFF2-40B4-BE49-F238E27FC236}">
-                <a16:creationId xmlns:a16="http://schemas.microsoft.com/office/drawing/2014/main" id="{99D8E23E-766A-6302-DF26-76B4CF03FEA4}"/>
+                <a16:creationId xmlns:a16="http://schemas.microsoft.com/office/drawing/2014/main" id="{27814863-9F7D-E4C8-8D44-35AC31E68C18}"/>
               </a:ext>
             </a:extLst>
           </p:cNvPr>
@@ -525,7 +525,7 @@
           <p:cNvPr id="6" name="スライド番号プレースホルダー 5">
             <a:extLst>
               <a:ext uri="{FF2B5EF4-FFF2-40B4-BE49-F238E27FC236}">
-                <a16:creationId xmlns:a16="http://schemas.microsoft.com/office/drawing/2014/main" id="{EF443793-903C-21FC-448B-07C06B0900D6}"/>
+                <a16:creationId xmlns:a16="http://schemas.microsoft.com/office/drawing/2014/main" id="{D52785A5-6380-7305-7262-59D9184B7EB4}"/>
               </a:ext>
             </a:extLst>
           </p:cNvPr>
@@ -541,7 +541,7 @@
           <a:bodyPr/>
           <a:lstStyle/>
           <a:p>
-            <a:fld id="{610A6627-C065-4D7D-9ACF-25BC5809B906}" type="slidenum">
+            <a:fld id="{7753DB9A-5EB3-43AD-B1F7-2D855E5F213B}" type="slidenum">
               <a:rPr kumimoji="1" lang="ja-JP" altLang="en-US" smtClean="0"/>
               <a:t>‹#›</a:t>
             </a:fld>
@@ -552,7 +552,7 @@
     </p:spTree>
     <p:extLst>
       <p:ext uri="{BB962C8B-B14F-4D97-AF65-F5344CB8AC3E}">
-        <p14:creationId xmlns:p14="http://schemas.microsoft.com/office/powerpoint/2010/main" val="3636670598"/>
+        <p14:creationId xmlns:p14="http://schemas.microsoft.com/office/powerpoint/2010/main" val="428150426"/>
       </p:ext>
     </p:extLst>
   </p:cSld>
@@ -584,7 +584,7 @@
           <p:cNvPr id="2" name="縦書きタイトル 1">
             <a:extLst>
               <a:ext uri="{FF2B5EF4-FFF2-40B4-BE49-F238E27FC236}">
-                <a16:creationId xmlns:a16="http://schemas.microsoft.com/office/drawing/2014/main" id="{A225F05A-1C22-70E7-3CE7-0D1CAAA811B3}"/>
+                <a16:creationId xmlns:a16="http://schemas.microsoft.com/office/drawing/2014/main" id="{BCA9BBB6-EAED-7695-A099-594D4CE646CF}"/>
               </a:ext>
             </a:extLst>
           </p:cNvPr>
@@ -617,7 +617,7 @@
           <p:cNvPr id="3" name="縦書きテキスト プレースホルダー 2">
             <a:extLst>
               <a:ext uri="{FF2B5EF4-FFF2-40B4-BE49-F238E27FC236}">
-                <a16:creationId xmlns:a16="http://schemas.microsoft.com/office/drawing/2014/main" id="{F38A024E-F4B2-2219-5975-BE8866AFAFDD}"/>
+                <a16:creationId xmlns:a16="http://schemas.microsoft.com/office/drawing/2014/main" id="{996654A5-4CAB-4204-FE2E-BD6DC9FE6ED8}"/>
               </a:ext>
             </a:extLst>
           </p:cNvPr>
@@ -711,7 +711,7 @@
           <p:cNvPr id="4" name="日付プレースホルダー 3">
             <a:extLst>
               <a:ext uri="{FF2B5EF4-FFF2-40B4-BE49-F238E27FC236}">
-                <a16:creationId xmlns:a16="http://schemas.microsoft.com/office/drawing/2014/main" id="{07E87621-D21A-04EE-6305-E62F84B4BAE7}"/>
+                <a16:creationId xmlns:a16="http://schemas.microsoft.com/office/drawing/2014/main" id="{C26B21B6-4ABE-7600-A5D5-ACF837C81A1E}"/>
               </a:ext>
             </a:extLst>
           </p:cNvPr>
@@ -727,7 +727,7 @@
           <a:bodyPr/>
           <a:lstStyle/>
           <a:p>
-            <a:fld id="{896E1C1C-01C7-4CAE-AEC3-A01BE6B4FB87}" type="datetimeFigureOut">
+            <a:fld id="{E5263023-A351-4726-BFA0-A7895307A359}" type="datetimeFigureOut">
               <a:rPr kumimoji="1" lang="ja-JP" altLang="en-US" smtClean="0"/>
               <a:t>2026/7/30</a:t>
             </a:fld>
@@ -740,7 +740,7 @@
           <p:cNvPr id="5" name="フッター プレースホルダー 4">
             <a:extLst>
               <a:ext uri="{FF2B5EF4-FFF2-40B4-BE49-F238E27FC236}">
-                <a16:creationId xmlns:a16="http://schemas.microsoft.com/office/drawing/2014/main" id="{C3FBA305-79FA-5F45-B543-17CB136C76B8}"/>
+                <a16:creationId xmlns:a16="http://schemas.microsoft.com/office/drawing/2014/main" id="{5AD81486-800C-DEED-E014-3E01E596831A}"/>
               </a:ext>
             </a:extLst>
           </p:cNvPr>
@@ -765,7 +765,7 @@
           <p:cNvPr id="6" name="スライド番号プレースホルダー 5">
             <a:extLst>
               <a:ext uri="{FF2B5EF4-FFF2-40B4-BE49-F238E27FC236}">
-                <a16:creationId xmlns:a16="http://schemas.microsoft.com/office/drawing/2014/main" id="{E62A7421-3DC5-4133-DEC9-65A79F537C76}"/>
+                <a16:creationId xmlns:a16="http://schemas.microsoft.com/office/drawing/2014/main" id="{3787BFEC-5374-9230-F74B-7E74BD6D7D7C}"/>
               </a:ext>
             </a:extLst>
           </p:cNvPr>
@@ -781,7 +781,7 @@
           <a:bodyPr/>
           <a:lstStyle/>
           <a:p>
-            <a:fld id="{610A6627-C065-4D7D-9ACF-25BC5809B906}" type="slidenum">
+            <a:fld id="{7753DB9A-5EB3-43AD-B1F7-2D855E5F213B}" type="slidenum">
               <a:rPr kumimoji="1" lang="ja-JP" altLang="en-US" smtClean="0"/>
               <a:t>‹#›</a:t>
             </a:fld>
@@ -792,7 +792,7 @@
     </p:spTree>
     <p:extLst>
       <p:ext uri="{BB962C8B-B14F-4D97-AF65-F5344CB8AC3E}">
-        <p14:creationId xmlns:p14="http://schemas.microsoft.com/office/powerpoint/2010/main" val="2415692323"/>
+        <p14:creationId xmlns:p14="http://schemas.microsoft.com/office/powerpoint/2010/main" val="2184751978"/>
       </p:ext>
     </p:extLst>
   </p:cSld>
@@ -824,7 +824,7 @@
           <p:cNvPr id="2" name="タイトル 1">
             <a:extLst>
               <a:ext uri="{FF2B5EF4-FFF2-40B4-BE49-F238E27FC236}">
-                <a16:creationId xmlns:a16="http://schemas.microsoft.com/office/drawing/2014/main" id="{8006223A-B62E-8CAD-AA10-714D5D98965E}"/>
+                <a16:creationId xmlns:a16="http://schemas.microsoft.com/office/drawing/2014/main" id="{6DD3FAA6-9063-9595-9883-01D9FD4BA132}"/>
               </a:ext>
             </a:extLst>
           </p:cNvPr>
@@ -852,7 +852,7 @@
           <p:cNvPr id="3" name="コンテンツ プレースホルダー 2">
             <a:extLst>
               <a:ext uri="{FF2B5EF4-FFF2-40B4-BE49-F238E27FC236}">
-                <a16:creationId xmlns:a16="http://schemas.microsoft.com/office/drawing/2014/main" id="{0D49C117-0163-4435-481F-DFA10F2FEB0D}"/>
+                <a16:creationId xmlns:a16="http://schemas.microsoft.com/office/drawing/2014/main" id="{CD1F80B9-6A74-8095-0D56-284D7A800634}"/>
               </a:ext>
             </a:extLst>
           </p:cNvPr>
@@ -941,7 +941,7 @@
           <p:cNvPr id="4" name="日付プレースホルダー 3">
             <a:extLst>
               <a:ext uri="{FF2B5EF4-FFF2-40B4-BE49-F238E27FC236}">
-                <a16:creationId xmlns:a16="http://schemas.microsoft.com/office/drawing/2014/main" id="{4FD0DE8E-B9C3-51DC-9AEE-923809F6A8D4}"/>
+                <a16:creationId xmlns:a16="http://schemas.microsoft.com/office/drawing/2014/main" id="{744EE0AE-2F1A-4D12-B414-66590D036D5B}"/>
               </a:ext>
             </a:extLst>
           </p:cNvPr>
@@ -957,7 +957,7 @@
           <a:bodyPr/>
           <a:lstStyle/>
           <a:p>
-            <a:fld id="{896E1C1C-01C7-4CAE-AEC3-A01BE6B4FB87}" type="datetimeFigureOut">
+            <a:fld id="{E5263023-A351-4726-BFA0-A7895307A359}" type="datetimeFigureOut">
               <a:rPr kumimoji="1" lang="ja-JP" altLang="en-US" smtClean="0"/>
               <a:t>2026/7/30</a:t>
             </a:fld>
@@ -970,7 +970,7 @@
           <p:cNvPr id="5" name="フッター プレースホルダー 4">
             <a:extLst>
               <a:ext uri="{FF2B5EF4-FFF2-40B4-BE49-F238E27FC236}">
-                <a16:creationId xmlns:a16="http://schemas.microsoft.com/office/drawing/2014/main" id="{C548181D-4A60-147C-AF42-E625B7F46E05}"/>
+                <a16:creationId xmlns:a16="http://schemas.microsoft.com/office/drawing/2014/main" id="{6EDC5B81-C0F2-1C11-FD9D-3EAB98D9B42F}"/>
               </a:ext>
             </a:extLst>
           </p:cNvPr>
@@ -995,7 +995,7 @@
           <p:cNvPr id="6" name="スライド番号プレースホルダー 5">
             <a:extLst>
               <a:ext uri="{FF2B5EF4-FFF2-40B4-BE49-F238E27FC236}">
-                <a16:creationId xmlns:a16="http://schemas.microsoft.com/office/drawing/2014/main" id="{5111CA5D-FC99-44E4-4B37-4AAECF615734}"/>
+                <a16:creationId xmlns:a16="http://schemas.microsoft.com/office/drawing/2014/main" id="{4FB36183-99E4-5158-E7AC-F65A9A02A401}"/>
               </a:ext>
             </a:extLst>
           </p:cNvPr>
@@ -1011,7 +1011,7 @@
           <a:bodyPr/>
           <a:lstStyle/>
           <a:p>
-            <a:fld id="{610A6627-C065-4D7D-9ACF-25BC5809B906}" type="slidenum">
+            <a:fld id="{7753DB9A-5EB3-43AD-B1F7-2D855E5F213B}" type="slidenum">
               <a:rPr kumimoji="1" lang="ja-JP" altLang="en-US" smtClean="0"/>
               <a:t>‹#›</a:t>
             </a:fld>
@@ -1022,7 +1022,7 @@
     </p:spTree>
     <p:extLst>
       <p:ext uri="{BB962C8B-B14F-4D97-AF65-F5344CB8AC3E}">
-        <p14:creationId xmlns:p14="http://schemas.microsoft.com/office/powerpoint/2010/main" val="2453020942"/>
+        <p14:creationId xmlns:p14="http://schemas.microsoft.com/office/powerpoint/2010/main" val="3399163816"/>
       </p:ext>
     </p:extLst>
   </p:cSld>
@@ -1054,7 +1054,7 @@
           <p:cNvPr id="2" name="タイトル 1">
             <a:extLst>
               <a:ext uri="{FF2B5EF4-FFF2-40B4-BE49-F238E27FC236}">
-                <a16:creationId xmlns:a16="http://schemas.microsoft.com/office/drawing/2014/main" id="{1529CEE9-330D-5928-CCCD-4586C6D9BEF4}"/>
+                <a16:creationId xmlns:a16="http://schemas.microsoft.com/office/drawing/2014/main" id="{4709D05B-3C21-6CE0-CB96-28D71DDB4D89}"/>
               </a:ext>
             </a:extLst>
           </p:cNvPr>
@@ -1091,7 +1091,7 @@
           <p:cNvPr id="3" name="テキスト プレースホルダー 2">
             <a:extLst>
               <a:ext uri="{FF2B5EF4-FFF2-40B4-BE49-F238E27FC236}">
-                <a16:creationId xmlns:a16="http://schemas.microsoft.com/office/drawing/2014/main" id="{D21E52A5-4940-4017-B655-1CAC8845F0A5}"/>
+                <a16:creationId xmlns:a16="http://schemas.microsoft.com/office/drawing/2014/main" id="{1408E42D-048D-5967-1FDF-A064D16DEEE4}"/>
               </a:ext>
             </a:extLst>
           </p:cNvPr>
@@ -1216,7 +1216,7 @@
           <p:cNvPr id="4" name="日付プレースホルダー 3">
             <a:extLst>
               <a:ext uri="{FF2B5EF4-FFF2-40B4-BE49-F238E27FC236}">
-                <a16:creationId xmlns:a16="http://schemas.microsoft.com/office/drawing/2014/main" id="{BF55D5BA-BA48-10E0-28D6-FDA823120AC0}"/>
+                <a16:creationId xmlns:a16="http://schemas.microsoft.com/office/drawing/2014/main" id="{9BEF77D4-1C0F-A988-F0D6-56164DBBCB3B}"/>
               </a:ext>
             </a:extLst>
           </p:cNvPr>
@@ -1232,7 +1232,7 @@
           <a:bodyPr/>
           <a:lstStyle/>
           <a:p>
-            <a:fld id="{896E1C1C-01C7-4CAE-AEC3-A01BE6B4FB87}" type="datetimeFigureOut">
+            <a:fld id="{E5263023-A351-4726-BFA0-A7895307A359}" type="datetimeFigureOut">
               <a:rPr kumimoji="1" lang="ja-JP" altLang="en-US" smtClean="0"/>
               <a:t>2026/7/30</a:t>
             </a:fld>
@@ -1245,7 +1245,7 @@
           <p:cNvPr id="5" name="フッター プレースホルダー 4">
             <a:extLst>
               <a:ext uri="{FF2B5EF4-FFF2-40B4-BE49-F238E27FC236}">
-                <a16:creationId xmlns:a16="http://schemas.microsoft.com/office/drawing/2014/main" id="{46BB8E0B-9CEB-DE05-B049-957A80AD1DB7}"/>
+                <a16:creationId xmlns:a16="http://schemas.microsoft.com/office/drawing/2014/main" id="{46E5455E-4D52-B5A6-CBC6-852FA61A1C4F}"/>
               </a:ext>
             </a:extLst>
           </p:cNvPr>
@@ -1270,7 +1270,7 @@
           <p:cNvPr id="6" name="スライド番号プレースホルダー 5">
             <a:extLst>
               <a:ext uri="{FF2B5EF4-FFF2-40B4-BE49-F238E27FC236}">
-                <a16:creationId xmlns:a16="http://schemas.microsoft.com/office/drawing/2014/main" id="{105B0211-4E12-47C2-8BE5-2AE53BF89AD1}"/>
+                <a16:creationId xmlns:a16="http://schemas.microsoft.com/office/drawing/2014/main" id="{1844CB5F-A95C-D181-1C57-84FF6E1846CA}"/>
               </a:ext>
             </a:extLst>
           </p:cNvPr>
@@ -1286,7 +1286,7 @@
           <a:bodyPr/>
           <a:lstStyle/>
           <a:p>
-            <a:fld id="{610A6627-C065-4D7D-9ACF-25BC5809B906}" type="slidenum">
+            <a:fld id="{7753DB9A-5EB3-43AD-B1F7-2D855E5F213B}" type="slidenum">
               <a:rPr kumimoji="1" lang="ja-JP" altLang="en-US" smtClean="0"/>
               <a:t>‹#›</a:t>
             </a:fld>
@@ -1297,7 +1297,7 @@
     </p:spTree>
     <p:extLst>
       <p:ext uri="{BB962C8B-B14F-4D97-AF65-F5344CB8AC3E}">
-        <p14:creationId xmlns:p14="http://schemas.microsoft.com/office/powerpoint/2010/main" val="1925380161"/>
+        <p14:creationId xmlns:p14="http://schemas.microsoft.com/office/powerpoint/2010/main" val="2400900086"/>
       </p:ext>
     </p:extLst>
   </p:cSld>
@@ -1329,7 +1329,7 @@
           <p:cNvPr id="2" name="タイトル 1">
             <a:extLst>
               <a:ext uri="{FF2B5EF4-FFF2-40B4-BE49-F238E27FC236}">
-                <a16:creationId xmlns:a16="http://schemas.microsoft.com/office/drawing/2014/main" id="{83CFA0F0-923F-676A-D9F5-D6BFC6ABB292}"/>
+                <a16:creationId xmlns:a16="http://schemas.microsoft.com/office/drawing/2014/main" id="{642122CF-1D9C-DFE3-92A2-650EDCFDC026}"/>
               </a:ext>
             </a:extLst>
           </p:cNvPr>
@@ -1357,7 +1357,7 @@
           <p:cNvPr id="3" name="コンテンツ プレースホルダー 2">
             <a:extLst>
               <a:ext uri="{FF2B5EF4-FFF2-40B4-BE49-F238E27FC236}">
-                <a16:creationId xmlns:a16="http://schemas.microsoft.com/office/drawing/2014/main" id="{684394B2-5EA2-1AA6-F905-AE8484043A59}"/>
+                <a16:creationId xmlns:a16="http://schemas.microsoft.com/office/drawing/2014/main" id="{D0952298-C1B8-5E93-9303-300606F0CD2C}"/>
               </a:ext>
             </a:extLst>
           </p:cNvPr>
@@ -1451,7 +1451,7 @@
           <p:cNvPr id="4" name="コンテンツ プレースホルダー 3">
             <a:extLst>
               <a:ext uri="{FF2B5EF4-FFF2-40B4-BE49-F238E27FC236}">
-                <a16:creationId xmlns:a16="http://schemas.microsoft.com/office/drawing/2014/main" id="{134A5101-77E0-95E6-654F-C45D6698F62D}"/>
+                <a16:creationId xmlns:a16="http://schemas.microsoft.com/office/drawing/2014/main" id="{69C49871-437C-400D-14E1-D7182F15081D}"/>
               </a:ext>
             </a:extLst>
           </p:cNvPr>
@@ -1545,7 +1545,7 @@
           <p:cNvPr id="5" name="日付プレースホルダー 4">
             <a:extLst>
               <a:ext uri="{FF2B5EF4-FFF2-40B4-BE49-F238E27FC236}">
-                <a16:creationId xmlns:a16="http://schemas.microsoft.com/office/drawing/2014/main" id="{3148CDD6-BE4E-0810-B0AA-85CC68CCAE48}"/>
+                <a16:creationId xmlns:a16="http://schemas.microsoft.com/office/drawing/2014/main" id="{9475C928-8145-4ABB-755C-30AD6EF41541}"/>
               </a:ext>
             </a:extLst>
           </p:cNvPr>
@@ -1561,7 +1561,7 @@
           <a:bodyPr/>
           <a:lstStyle/>
           <a:p>
-            <a:fld id="{896E1C1C-01C7-4CAE-AEC3-A01BE6B4FB87}" type="datetimeFigureOut">
+            <a:fld id="{E5263023-A351-4726-BFA0-A7895307A359}" type="datetimeFigureOut">
               <a:rPr kumimoji="1" lang="ja-JP" altLang="en-US" smtClean="0"/>
               <a:t>2026/7/30</a:t>
             </a:fld>
@@ -1574,7 +1574,7 @@
           <p:cNvPr id="6" name="フッター プレースホルダー 5">
             <a:extLst>
               <a:ext uri="{FF2B5EF4-FFF2-40B4-BE49-F238E27FC236}">
-                <a16:creationId xmlns:a16="http://schemas.microsoft.com/office/drawing/2014/main" id="{13E8EEF4-D936-B511-D2F2-3F2FF3FC242A}"/>
+                <a16:creationId xmlns:a16="http://schemas.microsoft.com/office/drawing/2014/main" id="{1547337E-E1EE-1D00-94AB-2494562BEE90}"/>
               </a:ext>
             </a:extLst>
           </p:cNvPr>
@@ -1599,7 +1599,7 @@
           <p:cNvPr id="7" name="スライド番号プレースホルダー 6">
             <a:extLst>
               <a:ext uri="{FF2B5EF4-FFF2-40B4-BE49-F238E27FC236}">
-                <a16:creationId xmlns:a16="http://schemas.microsoft.com/office/drawing/2014/main" id="{C7475152-161E-2C0C-8B15-D1F207B1E2BD}"/>
+                <a16:creationId xmlns:a16="http://schemas.microsoft.com/office/drawing/2014/main" id="{04ABE3AE-3D79-D4CC-B48A-4AAA76DA6F64}"/>
               </a:ext>
             </a:extLst>
           </p:cNvPr>
@@ -1615,7 +1615,7 @@
           <a:bodyPr/>
           <a:lstStyle/>
           <a:p>
-            <a:fld id="{610A6627-C065-4D7D-9ACF-25BC5809B906}" type="slidenum">
+            <a:fld id="{7753DB9A-5EB3-43AD-B1F7-2D855E5F213B}" type="slidenum">
               <a:rPr kumimoji="1" lang="ja-JP" altLang="en-US" smtClean="0"/>
               <a:t>‹#›</a:t>
             </a:fld>
@@ -1626,7 +1626,7 @@
     </p:spTree>
     <p:extLst>
       <p:ext uri="{BB962C8B-B14F-4D97-AF65-F5344CB8AC3E}">
-        <p14:creationId xmlns:p14="http://schemas.microsoft.com/office/powerpoint/2010/main" val="1709151407"/>
+        <p14:creationId xmlns:p14="http://schemas.microsoft.com/office/powerpoint/2010/main" val="3892708669"/>
       </p:ext>
     </p:extLst>
   </p:cSld>
@@ -1658,7 +1658,7 @@
           <p:cNvPr id="2" name="タイトル 1">
             <a:extLst>
               <a:ext uri="{FF2B5EF4-FFF2-40B4-BE49-F238E27FC236}">
-                <a16:creationId xmlns:a16="http://schemas.microsoft.com/office/drawing/2014/main" id="{3B8BDD48-5AC0-ABCE-5F88-340E6247C940}"/>
+                <a16:creationId xmlns:a16="http://schemas.microsoft.com/office/drawing/2014/main" id="{FEAB49BB-67DA-F7DD-E969-0BF7695C91D1}"/>
               </a:ext>
             </a:extLst>
           </p:cNvPr>
@@ -1691,7 +1691,7 @@
           <p:cNvPr id="3" name="テキスト プレースホルダー 2">
             <a:extLst>
               <a:ext uri="{FF2B5EF4-FFF2-40B4-BE49-F238E27FC236}">
-                <a16:creationId xmlns:a16="http://schemas.microsoft.com/office/drawing/2014/main" id="{A815D89B-EDC4-FA8B-0C13-580950DFA5AD}"/>
+                <a16:creationId xmlns:a16="http://schemas.microsoft.com/office/drawing/2014/main" id="{9D16E6BD-6791-1286-D775-DAFB8C01DE7A}"/>
               </a:ext>
             </a:extLst>
           </p:cNvPr>
@@ -1762,7 +1762,7 @@
           <p:cNvPr id="4" name="コンテンツ プレースホルダー 3">
             <a:extLst>
               <a:ext uri="{FF2B5EF4-FFF2-40B4-BE49-F238E27FC236}">
-                <a16:creationId xmlns:a16="http://schemas.microsoft.com/office/drawing/2014/main" id="{71A32E84-065D-B93E-7096-8898B0E400AF}"/>
+                <a16:creationId xmlns:a16="http://schemas.microsoft.com/office/drawing/2014/main" id="{8A701202-1280-581A-42A5-E22959E24598}"/>
               </a:ext>
             </a:extLst>
           </p:cNvPr>
@@ -1856,7 +1856,7 @@
           <p:cNvPr id="5" name="テキスト プレースホルダー 4">
             <a:extLst>
               <a:ext uri="{FF2B5EF4-FFF2-40B4-BE49-F238E27FC236}">
-                <a16:creationId xmlns:a16="http://schemas.microsoft.com/office/drawing/2014/main" id="{ACB2D736-DD2F-BBCB-DCF7-83F6980B341E}"/>
+                <a16:creationId xmlns:a16="http://schemas.microsoft.com/office/drawing/2014/main" id="{A6E0D032-5470-47F6-4148-92C9EFED3D0F}"/>
               </a:ext>
             </a:extLst>
           </p:cNvPr>
@@ -1927,7 +1927,7 @@
           <p:cNvPr id="6" name="コンテンツ プレースホルダー 5">
             <a:extLst>
               <a:ext uri="{FF2B5EF4-FFF2-40B4-BE49-F238E27FC236}">
-                <a16:creationId xmlns:a16="http://schemas.microsoft.com/office/drawing/2014/main" id="{3A8CFEFF-557C-D363-EC21-70AB89929D55}"/>
+                <a16:creationId xmlns:a16="http://schemas.microsoft.com/office/drawing/2014/main" id="{A06E8C8D-CDD7-5177-6DC5-80A3ED162924}"/>
               </a:ext>
             </a:extLst>
           </p:cNvPr>
@@ -2021,7 +2021,7 @@
           <p:cNvPr id="7" name="日付プレースホルダー 6">
             <a:extLst>
               <a:ext uri="{FF2B5EF4-FFF2-40B4-BE49-F238E27FC236}">
-                <a16:creationId xmlns:a16="http://schemas.microsoft.com/office/drawing/2014/main" id="{9889E045-7534-B95C-FFE2-3D2DD9741614}"/>
+                <a16:creationId xmlns:a16="http://schemas.microsoft.com/office/drawing/2014/main" id="{E664781D-95F8-074B-2639-459D4A1EB705}"/>
               </a:ext>
             </a:extLst>
           </p:cNvPr>
@@ -2037,7 +2037,7 @@
           <a:bodyPr/>
           <a:lstStyle/>
           <a:p>
-            <a:fld id="{896E1C1C-01C7-4CAE-AEC3-A01BE6B4FB87}" type="datetimeFigureOut">
+            <a:fld id="{E5263023-A351-4726-BFA0-A7895307A359}" type="datetimeFigureOut">
               <a:rPr kumimoji="1" lang="ja-JP" altLang="en-US" smtClean="0"/>
               <a:t>2026/7/30</a:t>
             </a:fld>
@@ -2050,7 +2050,7 @@
           <p:cNvPr id="8" name="フッター プレースホルダー 7">
             <a:extLst>
               <a:ext uri="{FF2B5EF4-FFF2-40B4-BE49-F238E27FC236}">
-                <a16:creationId xmlns:a16="http://schemas.microsoft.com/office/drawing/2014/main" id="{065CE4BF-4F12-09ED-ABD5-AAC2C7DE7D93}"/>
+                <a16:creationId xmlns:a16="http://schemas.microsoft.com/office/drawing/2014/main" id="{1EDA0C4B-A0DF-8DB2-67C6-9F862955A1AF}"/>
               </a:ext>
             </a:extLst>
           </p:cNvPr>
@@ -2075,7 +2075,7 @@
           <p:cNvPr id="9" name="スライド番号プレースホルダー 8">
             <a:extLst>
               <a:ext uri="{FF2B5EF4-FFF2-40B4-BE49-F238E27FC236}">
-                <a16:creationId xmlns:a16="http://schemas.microsoft.com/office/drawing/2014/main" id="{31B0313B-6E9D-BDE8-D856-A5F8574ED44B}"/>
+                <a16:creationId xmlns:a16="http://schemas.microsoft.com/office/drawing/2014/main" id="{1D21BB34-002F-1B9C-AF7B-040A5D4FE0D1}"/>
               </a:ext>
             </a:extLst>
           </p:cNvPr>
@@ -2091,7 +2091,7 @@
           <a:bodyPr/>
           <a:lstStyle/>
           <a:p>
-            <a:fld id="{610A6627-C065-4D7D-9ACF-25BC5809B906}" type="slidenum">
+            <a:fld id="{7753DB9A-5EB3-43AD-B1F7-2D855E5F213B}" type="slidenum">
               <a:rPr kumimoji="1" lang="ja-JP" altLang="en-US" smtClean="0"/>
               <a:t>‹#›</a:t>
             </a:fld>
@@ -2102,7 +2102,7 @@
     </p:spTree>
     <p:extLst>
       <p:ext uri="{BB962C8B-B14F-4D97-AF65-F5344CB8AC3E}">
-        <p14:creationId xmlns:p14="http://schemas.microsoft.com/office/powerpoint/2010/main" val="2590578988"/>
+        <p14:creationId xmlns:p14="http://schemas.microsoft.com/office/powerpoint/2010/main" val="3153356306"/>
       </p:ext>
     </p:extLst>
   </p:cSld>
@@ -2134,7 +2134,7 @@
           <p:cNvPr id="2" name="タイトル 1">
             <a:extLst>
               <a:ext uri="{FF2B5EF4-FFF2-40B4-BE49-F238E27FC236}">
-                <a16:creationId xmlns:a16="http://schemas.microsoft.com/office/drawing/2014/main" id="{5E389F2B-3681-D50C-87E6-514C866879D3}"/>
+                <a16:creationId xmlns:a16="http://schemas.microsoft.com/office/drawing/2014/main" id="{650AF756-1485-641E-C9EE-05FDE88CB004}"/>
               </a:ext>
             </a:extLst>
           </p:cNvPr>
@@ -2162,7 +2162,7 @@
           <p:cNvPr id="3" name="日付プレースホルダー 2">
             <a:extLst>
               <a:ext uri="{FF2B5EF4-FFF2-40B4-BE49-F238E27FC236}">
-                <a16:creationId xmlns:a16="http://schemas.microsoft.com/office/drawing/2014/main" id="{8D5DEF10-EEAF-5B41-7FC3-4235C61468B7}"/>
+                <a16:creationId xmlns:a16="http://schemas.microsoft.com/office/drawing/2014/main" id="{61FC1F23-D4BC-63F8-43FC-92A2A528C0FA}"/>
               </a:ext>
             </a:extLst>
           </p:cNvPr>
@@ -2178,7 +2178,7 @@
           <a:bodyPr/>
           <a:lstStyle/>
           <a:p>
-            <a:fld id="{896E1C1C-01C7-4CAE-AEC3-A01BE6B4FB87}" type="datetimeFigureOut">
+            <a:fld id="{E5263023-A351-4726-BFA0-A7895307A359}" type="datetimeFigureOut">
               <a:rPr kumimoji="1" lang="ja-JP" altLang="en-US" smtClean="0"/>
               <a:t>2026/7/30</a:t>
             </a:fld>
@@ -2191,7 +2191,7 @@
           <p:cNvPr id="4" name="フッター プレースホルダー 3">
             <a:extLst>
               <a:ext uri="{FF2B5EF4-FFF2-40B4-BE49-F238E27FC236}">
-                <a16:creationId xmlns:a16="http://schemas.microsoft.com/office/drawing/2014/main" id="{53F9F25D-A3A5-7E4E-4A77-A5EDBF9FA07B}"/>
+                <a16:creationId xmlns:a16="http://schemas.microsoft.com/office/drawing/2014/main" id="{8DAE43CE-C00E-C13D-D249-FB2BD0E70868}"/>
               </a:ext>
             </a:extLst>
           </p:cNvPr>
@@ -2216,7 +2216,7 @@
           <p:cNvPr id="5" name="スライド番号プレースホルダー 4">
             <a:extLst>
               <a:ext uri="{FF2B5EF4-FFF2-40B4-BE49-F238E27FC236}">
-                <a16:creationId xmlns:a16="http://schemas.microsoft.com/office/drawing/2014/main" id="{3A0E6FB5-3E42-0178-1EF6-6A1A16E8D507}"/>
+                <a16:creationId xmlns:a16="http://schemas.microsoft.com/office/drawing/2014/main" id="{2271915A-E3B2-09B0-C14C-3C189B908608}"/>
               </a:ext>
             </a:extLst>
           </p:cNvPr>
@@ -2232,7 +2232,7 @@
           <a:bodyPr/>
           <a:lstStyle/>
           <a:p>
-            <a:fld id="{610A6627-C065-4D7D-9ACF-25BC5809B906}" type="slidenum">
+            <a:fld id="{7753DB9A-5EB3-43AD-B1F7-2D855E5F213B}" type="slidenum">
               <a:rPr kumimoji="1" lang="ja-JP" altLang="en-US" smtClean="0"/>
               <a:t>‹#›</a:t>
             </a:fld>
@@ -2243,7 +2243,7 @@
     </p:spTree>
     <p:extLst>
       <p:ext uri="{BB962C8B-B14F-4D97-AF65-F5344CB8AC3E}">
-        <p14:creationId xmlns:p14="http://schemas.microsoft.com/office/powerpoint/2010/main" val="2272445304"/>
+        <p14:creationId xmlns:p14="http://schemas.microsoft.com/office/powerpoint/2010/main" val="1510905604"/>
       </p:ext>
     </p:extLst>
   </p:cSld>
@@ -2275,7 +2275,7 @@
           <p:cNvPr id="2" name="日付プレースホルダー 1">
             <a:extLst>
               <a:ext uri="{FF2B5EF4-FFF2-40B4-BE49-F238E27FC236}">
-                <a16:creationId xmlns:a16="http://schemas.microsoft.com/office/drawing/2014/main" id="{3D4BC4D9-976C-6B53-832A-0E7102E1FBCC}"/>
+                <a16:creationId xmlns:a16="http://schemas.microsoft.com/office/drawing/2014/main" id="{712A3181-2B0B-D8E8-6A2B-B2F4D4E45D6C}"/>
               </a:ext>
             </a:extLst>
           </p:cNvPr>
@@ -2291,7 +2291,7 @@
           <a:bodyPr/>
           <a:lstStyle/>
           <a:p>
-            <a:fld id="{896E1C1C-01C7-4CAE-AEC3-A01BE6B4FB87}" type="datetimeFigureOut">
+            <a:fld id="{E5263023-A351-4726-BFA0-A7895307A359}" type="datetimeFigureOut">
               <a:rPr kumimoji="1" lang="ja-JP" altLang="en-US" smtClean="0"/>
               <a:t>2026/7/30</a:t>
             </a:fld>
@@ -2304,7 +2304,7 @@
           <p:cNvPr id="3" name="フッター プレースホルダー 2">
             <a:extLst>
               <a:ext uri="{FF2B5EF4-FFF2-40B4-BE49-F238E27FC236}">
-                <a16:creationId xmlns:a16="http://schemas.microsoft.com/office/drawing/2014/main" id="{356C5776-8C21-5C06-FBD0-7371B5F1879A}"/>
+                <a16:creationId xmlns:a16="http://schemas.microsoft.com/office/drawing/2014/main" id="{44EABF51-5B1E-AD01-2A21-057E3A7BCFD1}"/>
               </a:ext>
             </a:extLst>
           </p:cNvPr>
@@ -2329,7 +2329,7 @@
           <p:cNvPr id="4" name="スライド番号プレースホルダー 3">
             <a:extLst>
               <a:ext uri="{FF2B5EF4-FFF2-40B4-BE49-F238E27FC236}">
-                <a16:creationId xmlns:a16="http://schemas.microsoft.com/office/drawing/2014/main" id="{C880A202-FD28-6E8C-E137-B565835D713A}"/>
+                <a16:creationId xmlns:a16="http://schemas.microsoft.com/office/drawing/2014/main" id="{FCBB631B-A783-D919-03DD-838B5F4B9E94}"/>
               </a:ext>
             </a:extLst>
           </p:cNvPr>
@@ -2345,7 +2345,7 @@
           <a:bodyPr/>
           <a:lstStyle/>
           <a:p>
-            <a:fld id="{610A6627-C065-4D7D-9ACF-25BC5809B906}" type="slidenum">
+            <a:fld id="{7753DB9A-5EB3-43AD-B1F7-2D855E5F213B}" type="slidenum">
               <a:rPr kumimoji="1" lang="ja-JP" altLang="en-US" smtClean="0"/>
               <a:t>‹#›</a:t>
             </a:fld>
@@ -2356,7 +2356,7 @@
     </p:spTree>
     <p:extLst>
       <p:ext uri="{BB962C8B-B14F-4D97-AF65-F5344CB8AC3E}">
-        <p14:creationId xmlns:p14="http://schemas.microsoft.com/office/powerpoint/2010/main" val="2512671869"/>
+        <p14:creationId xmlns:p14="http://schemas.microsoft.com/office/powerpoint/2010/main" val="2498594891"/>
       </p:ext>
     </p:extLst>
   </p:cSld>
@@ -2388,7 +2388,7 @@
           <p:cNvPr id="2" name="タイトル 1">
             <a:extLst>
               <a:ext uri="{FF2B5EF4-FFF2-40B4-BE49-F238E27FC236}">
-                <a16:creationId xmlns:a16="http://schemas.microsoft.com/office/drawing/2014/main" id="{A6C2D358-1CFE-577A-EE01-CA77864F5BA4}"/>
+                <a16:creationId xmlns:a16="http://schemas.microsoft.com/office/drawing/2014/main" id="{884869FF-8ECD-3F7A-B7DA-4553F1C6678B}"/>
               </a:ext>
             </a:extLst>
           </p:cNvPr>
@@ -2425,7 +2425,7 @@
           <p:cNvPr id="3" name="コンテンツ プレースホルダー 2">
             <a:extLst>
               <a:ext uri="{FF2B5EF4-FFF2-40B4-BE49-F238E27FC236}">
-                <a16:creationId xmlns:a16="http://schemas.microsoft.com/office/drawing/2014/main" id="{AFBBB33A-3CA3-0DF7-27D5-75D949E34BBD}"/>
+                <a16:creationId xmlns:a16="http://schemas.microsoft.com/office/drawing/2014/main" id="{A36249F1-04E1-716D-BAA1-D0D580F00ACC}"/>
               </a:ext>
             </a:extLst>
           </p:cNvPr>
@@ -2547,7 +2547,7 @@
           <p:cNvPr id="4" name="テキスト プレースホルダー 3">
             <a:extLst>
               <a:ext uri="{FF2B5EF4-FFF2-40B4-BE49-F238E27FC236}">
-                <a16:creationId xmlns:a16="http://schemas.microsoft.com/office/drawing/2014/main" id="{A5EDDEC1-0782-360A-2C2F-8B7E143F8C07}"/>
+                <a16:creationId xmlns:a16="http://schemas.microsoft.com/office/drawing/2014/main" id="{47B059D3-F1CA-A55E-41A2-9B5014352794}"/>
               </a:ext>
             </a:extLst>
           </p:cNvPr>
@@ -2618,7 +2618,7 @@
           <p:cNvPr id="5" name="日付プレースホルダー 4">
             <a:extLst>
               <a:ext uri="{FF2B5EF4-FFF2-40B4-BE49-F238E27FC236}">
-                <a16:creationId xmlns:a16="http://schemas.microsoft.com/office/drawing/2014/main" id="{627DE3FB-8AAB-B5FE-B0CD-02C14D0063D9}"/>
+                <a16:creationId xmlns:a16="http://schemas.microsoft.com/office/drawing/2014/main" id="{08154C08-35E0-C066-9377-AFCB666CD3D4}"/>
               </a:ext>
             </a:extLst>
           </p:cNvPr>
@@ -2634,7 +2634,7 @@
           <a:bodyPr/>
           <a:lstStyle/>
           <a:p>
-            <a:fld id="{896E1C1C-01C7-4CAE-AEC3-A01BE6B4FB87}" type="datetimeFigureOut">
+            <a:fld id="{E5263023-A351-4726-BFA0-A7895307A359}" type="datetimeFigureOut">
               <a:rPr kumimoji="1" lang="ja-JP" altLang="en-US" smtClean="0"/>
               <a:t>2026/7/30</a:t>
             </a:fld>
@@ -2647,7 +2647,7 @@
           <p:cNvPr id="6" name="フッター プレースホルダー 5">
             <a:extLst>
               <a:ext uri="{FF2B5EF4-FFF2-40B4-BE49-F238E27FC236}">
-                <a16:creationId xmlns:a16="http://schemas.microsoft.com/office/drawing/2014/main" id="{61DDC9D7-8479-0DD0-C613-39A884EE1E8C}"/>
+                <a16:creationId xmlns:a16="http://schemas.microsoft.com/office/drawing/2014/main" id="{552A1498-2909-0B23-7BC9-BE595FEE5BF5}"/>
               </a:ext>
             </a:extLst>
           </p:cNvPr>
@@ -2672,7 +2672,7 @@
           <p:cNvPr id="7" name="スライド番号プレースホルダー 6">
             <a:extLst>
               <a:ext uri="{FF2B5EF4-FFF2-40B4-BE49-F238E27FC236}">
-                <a16:creationId xmlns:a16="http://schemas.microsoft.com/office/drawing/2014/main" id="{8BEDBF55-92E2-32F0-E8E6-2A9E03E36119}"/>
+                <a16:creationId xmlns:a16="http://schemas.microsoft.com/office/drawing/2014/main" id="{F0DAB8A2-77F4-CA9D-A5BE-8BC6874169BD}"/>
               </a:ext>
             </a:extLst>
           </p:cNvPr>
@@ -2688,7 +2688,7 @@
           <a:bodyPr/>
           <a:lstStyle/>
           <a:p>
-            <a:fld id="{610A6627-C065-4D7D-9ACF-25BC5809B906}" type="slidenum">
+            <a:fld id="{7753DB9A-5EB3-43AD-B1F7-2D855E5F213B}" type="slidenum">
               <a:rPr kumimoji="1" lang="ja-JP" altLang="en-US" smtClean="0"/>
               <a:t>‹#›</a:t>
             </a:fld>
@@ -2699,7 +2699,7 @@
     </p:spTree>
     <p:extLst>
       <p:ext uri="{BB962C8B-B14F-4D97-AF65-F5344CB8AC3E}">
-        <p14:creationId xmlns:p14="http://schemas.microsoft.com/office/powerpoint/2010/main" val="2389481872"/>
+        <p14:creationId xmlns:p14="http://schemas.microsoft.com/office/powerpoint/2010/main" val="2430998026"/>
       </p:ext>
     </p:extLst>
   </p:cSld>
@@ -2731,7 +2731,7 @@
           <p:cNvPr id="2" name="タイトル 1">
             <a:extLst>
               <a:ext uri="{FF2B5EF4-FFF2-40B4-BE49-F238E27FC236}">
-                <a16:creationId xmlns:a16="http://schemas.microsoft.com/office/drawing/2014/main" id="{FFC6E032-852E-530C-128A-07853277BCC7}"/>
+                <a16:creationId xmlns:a16="http://schemas.microsoft.com/office/drawing/2014/main" id="{46ABC4E3-F805-BF86-6CFC-088BF454CD73}"/>
               </a:ext>
             </a:extLst>
           </p:cNvPr>
@@ -2768,7 +2768,7 @@
           <p:cNvPr id="3" name="図プレースホルダー 2">
             <a:extLst>
               <a:ext uri="{FF2B5EF4-FFF2-40B4-BE49-F238E27FC236}">
-                <a16:creationId xmlns:a16="http://schemas.microsoft.com/office/drawing/2014/main" id="{3E666EDC-B432-5563-E85F-7E4C76BB94C3}"/>
+                <a16:creationId xmlns:a16="http://schemas.microsoft.com/office/drawing/2014/main" id="{ED527446-D0A0-51AC-D4C4-F9F52B8637E6}"/>
               </a:ext>
             </a:extLst>
           </p:cNvPr>
@@ -2835,7 +2835,7 @@
           <p:cNvPr id="4" name="テキスト プレースホルダー 3">
             <a:extLst>
               <a:ext uri="{FF2B5EF4-FFF2-40B4-BE49-F238E27FC236}">
-                <a16:creationId xmlns:a16="http://schemas.microsoft.com/office/drawing/2014/main" id="{DCEAB529-2901-15DA-8C64-2F5B1AA0CFD3}"/>
+                <a16:creationId xmlns:a16="http://schemas.microsoft.com/office/drawing/2014/main" id="{67675110-E3F8-85B6-98DE-21324D4247D2}"/>
               </a:ext>
             </a:extLst>
           </p:cNvPr>
@@ -2906,7 +2906,7 @@
           <p:cNvPr id="5" name="日付プレースホルダー 4">
             <a:extLst>
               <a:ext uri="{FF2B5EF4-FFF2-40B4-BE49-F238E27FC236}">
-                <a16:creationId xmlns:a16="http://schemas.microsoft.com/office/drawing/2014/main" id="{D88401EE-3EEB-4830-2485-619B7FB5920C}"/>
+                <a16:creationId xmlns:a16="http://schemas.microsoft.com/office/drawing/2014/main" id="{DB5EDC52-292A-F991-2637-F916053E7743}"/>
               </a:ext>
             </a:extLst>
           </p:cNvPr>
@@ -2922,7 +2922,7 @@
           <a:bodyPr/>
           <a:lstStyle/>
           <a:p>
-            <a:fld id="{896E1C1C-01C7-4CAE-AEC3-A01BE6B4FB87}" type="datetimeFigureOut">
+            <a:fld id="{E5263023-A351-4726-BFA0-A7895307A359}" type="datetimeFigureOut">
               <a:rPr kumimoji="1" lang="ja-JP" altLang="en-US" smtClean="0"/>
               <a:t>2026/7/30</a:t>
             </a:fld>
@@ -2935,7 +2935,7 @@
           <p:cNvPr id="6" name="フッター プレースホルダー 5">
             <a:extLst>
               <a:ext uri="{FF2B5EF4-FFF2-40B4-BE49-F238E27FC236}">
-                <a16:creationId xmlns:a16="http://schemas.microsoft.com/office/drawing/2014/main" id="{915674DB-434D-8C6D-7CE3-27C48A388E66}"/>
+                <a16:creationId xmlns:a16="http://schemas.microsoft.com/office/drawing/2014/main" id="{E03F68E3-80F0-E08A-0E6E-43EFE2013780}"/>
               </a:ext>
             </a:extLst>
           </p:cNvPr>
@@ -2960,7 +2960,7 @@
           <p:cNvPr id="7" name="スライド番号プレースホルダー 6">
             <a:extLst>
               <a:ext uri="{FF2B5EF4-FFF2-40B4-BE49-F238E27FC236}">
-                <a16:creationId xmlns:a16="http://schemas.microsoft.com/office/drawing/2014/main" id="{A4AC4F10-680F-3DBC-E058-7A438E038A2C}"/>
+                <a16:creationId xmlns:a16="http://schemas.microsoft.com/office/drawing/2014/main" id="{6D67E462-AAE3-8533-8077-7CC1176CCE04}"/>
               </a:ext>
             </a:extLst>
           </p:cNvPr>
@@ -2976,7 +2976,7 @@
           <a:bodyPr/>
           <a:lstStyle/>
           <a:p>
-            <a:fld id="{610A6627-C065-4D7D-9ACF-25BC5809B906}" type="slidenum">
+            <a:fld id="{7753DB9A-5EB3-43AD-B1F7-2D855E5F213B}" type="slidenum">
               <a:rPr kumimoji="1" lang="ja-JP" altLang="en-US" smtClean="0"/>
               <a:t>‹#›</a:t>
             </a:fld>
@@ -2987,7 +2987,7 @@
     </p:spTree>
     <p:extLst>
       <p:ext uri="{BB962C8B-B14F-4D97-AF65-F5344CB8AC3E}">
-        <p14:creationId xmlns:p14="http://schemas.microsoft.com/office/powerpoint/2010/main" val="2014992143"/>
+        <p14:creationId xmlns:p14="http://schemas.microsoft.com/office/powerpoint/2010/main" val="2770661788"/>
       </p:ext>
     </p:extLst>
   </p:cSld>
@@ -3024,7 +3024,7 @@
           <p:cNvPr id="2" name="タイトル プレースホルダー 1">
             <a:extLst>
               <a:ext uri="{FF2B5EF4-FFF2-40B4-BE49-F238E27FC236}">
-                <a16:creationId xmlns:a16="http://schemas.microsoft.com/office/drawing/2014/main" id="{49B892EC-6BEB-331F-555D-11C439A29BEF}"/>
+                <a16:creationId xmlns:a16="http://schemas.microsoft.com/office/drawing/2014/main" id="{878654C8-15CB-FA24-D5B7-0E0B3D6D0760}"/>
               </a:ext>
             </a:extLst>
           </p:cNvPr>
@@ -3062,7 +3062,7 @@
           <p:cNvPr id="3" name="テキスト プレースホルダー 2">
             <a:extLst>
               <a:ext uri="{FF2B5EF4-FFF2-40B4-BE49-F238E27FC236}">
-                <a16:creationId xmlns:a16="http://schemas.microsoft.com/office/drawing/2014/main" id="{E9245988-56D8-BCD0-8B70-0E0C194A7D7D}"/>
+                <a16:creationId xmlns:a16="http://schemas.microsoft.com/office/drawing/2014/main" id="{8D09FE3F-9B2B-C363-8FE7-8D257BEA1ADB}"/>
               </a:ext>
             </a:extLst>
           </p:cNvPr>
@@ -3161,7 +3161,7 @@
           <p:cNvPr id="4" name="日付プレースホルダー 3">
             <a:extLst>
               <a:ext uri="{FF2B5EF4-FFF2-40B4-BE49-F238E27FC236}">
-                <a16:creationId xmlns:a16="http://schemas.microsoft.com/office/drawing/2014/main" id="{3DC0FD53-CB6B-8A63-C3A9-B031DB949CA8}"/>
+                <a16:creationId xmlns:a16="http://schemas.microsoft.com/office/drawing/2014/main" id="{AEA44604-AD6E-F508-0007-6E137F7B88D1}"/>
               </a:ext>
             </a:extLst>
           </p:cNvPr>
@@ -3195,7 +3195,7 @@
             </a:lvl1pPr>
           </a:lstStyle>
           <a:p>
-            <a:fld id="{896E1C1C-01C7-4CAE-AEC3-A01BE6B4FB87}" type="datetimeFigureOut">
+            <a:fld id="{E5263023-A351-4726-BFA0-A7895307A359}" type="datetimeFigureOut">
               <a:rPr kumimoji="1" lang="ja-JP" altLang="en-US" smtClean="0"/>
               <a:t>2026/7/30</a:t>
             </a:fld>
@@ -3208,7 +3208,7 @@
           <p:cNvPr id="5" name="フッター プレースホルダー 4">
             <a:extLst>
               <a:ext uri="{FF2B5EF4-FFF2-40B4-BE49-F238E27FC236}">
-                <a16:creationId xmlns:a16="http://schemas.microsoft.com/office/drawing/2014/main" id="{4E398009-D1DA-B587-79BF-8B5ECE45E888}"/>
+                <a16:creationId xmlns:a16="http://schemas.microsoft.com/office/drawing/2014/main" id="{036DC444-28B3-0497-2F71-7B1B5C0077D9}"/>
               </a:ext>
             </a:extLst>
           </p:cNvPr>
@@ -3251,7 +3251,7 @@
           <p:cNvPr id="6" name="スライド番号プレースホルダー 5">
             <a:extLst>
               <a:ext uri="{FF2B5EF4-FFF2-40B4-BE49-F238E27FC236}">
-                <a16:creationId xmlns:a16="http://schemas.microsoft.com/office/drawing/2014/main" id="{EEDC1FA0-E96A-FC3F-DF9A-376BCEC71078}"/>
+                <a16:creationId xmlns:a16="http://schemas.microsoft.com/office/drawing/2014/main" id="{80EF2551-63AD-40BD-714C-E4AE9558142D}"/>
               </a:ext>
             </a:extLst>
           </p:cNvPr>
@@ -3285,7 +3285,7 @@
             </a:lvl1pPr>
           </a:lstStyle>
           <a:p>
-            <a:fld id="{610A6627-C065-4D7D-9ACF-25BC5809B906}" type="slidenum">
+            <a:fld id="{7753DB9A-5EB3-43AD-B1F7-2D855E5F213B}" type="slidenum">
               <a:rPr kumimoji="1" lang="ja-JP" altLang="en-US" smtClean="0"/>
               <a:t>‹#›</a:t>
             </a:fld>
@@ -3296,7 +3296,7 @@
     </p:spTree>
     <p:extLst>
       <p:ext uri="{BB962C8B-B14F-4D97-AF65-F5344CB8AC3E}">
-        <p14:creationId xmlns:p14="http://schemas.microsoft.com/office/powerpoint/2010/main" val="1929810594"/>
+        <p14:creationId xmlns:p14="http://schemas.microsoft.com/office/powerpoint/2010/main" val="1792848109"/>
       </p:ext>
     </p:extLst>
   </p:cSld>
@@ -3619,7 +3619,7 @@
           <p:cNvPr id="2" name="テキスト ボックス 1">
             <a:extLst>
               <a:ext uri="{FF2B5EF4-FFF2-40B4-BE49-F238E27FC236}">
-                <a16:creationId xmlns:a16="http://schemas.microsoft.com/office/drawing/2014/main" id="{E4611835-6036-D8E8-CBC2-6C706DE1EBCE}"/>
+                <a16:creationId xmlns:a16="http://schemas.microsoft.com/office/drawing/2014/main" id="{9FC38F55-169E-ACE0-C1EC-4CB12EC1A740}"/>
               </a:ext>
             </a:extLst>
           </p:cNvPr>
@@ -3665,7 +3665,7 @@
           <p:cNvPr id="3" name="テキスト ボックス 2">
             <a:extLst>
               <a:ext uri="{FF2B5EF4-FFF2-40B4-BE49-F238E27FC236}">
-                <a16:creationId xmlns:a16="http://schemas.microsoft.com/office/drawing/2014/main" id="{EE5C4D8B-6AF6-07E2-4471-A634C5B8DDAD}"/>
+                <a16:creationId xmlns:a16="http://schemas.microsoft.com/office/drawing/2014/main" id="{D78A577A-C431-5399-C430-772F8C499BA7}"/>
               </a:ext>
             </a:extLst>
           </p:cNvPr>
@@ -3714,7 +3714,7 @@
           <p:cNvPr id="4" name="テキスト ボックス 3">
             <a:extLst>
               <a:ext uri="{FF2B5EF4-FFF2-40B4-BE49-F238E27FC236}">
-                <a16:creationId xmlns:a16="http://schemas.microsoft.com/office/drawing/2014/main" id="{19D4CBFF-B28D-3182-8D17-DE46DFB549B8}"/>
+                <a16:creationId xmlns:a16="http://schemas.microsoft.com/office/drawing/2014/main" id="{B4734BFC-3094-41FA-EE37-EC3C2EABDBC5}"/>
               </a:ext>
             </a:extLst>
           </p:cNvPr>
@@ -3754,7 +3754,7 @@
           <p:cNvPr id="5" name="テキスト ボックス 4">
             <a:extLst>
               <a:ext uri="{FF2B5EF4-FFF2-40B4-BE49-F238E27FC236}">
-                <a16:creationId xmlns:a16="http://schemas.microsoft.com/office/drawing/2014/main" id="{74FFD2B9-EC7C-79F8-AEFE-7D4674ADABC1}"/>
+                <a16:creationId xmlns:a16="http://schemas.microsoft.com/office/drawing/2014/main" id="{B37E4693-E9E7-4870-DA60-9F815FE21056}"/>
               </a:ext>
             </a:extLst>
           </p:cNvPr>
@@ -3801,7 +3801,7 @@
             <a:hlinkClick r:id="" action="ppaction://media"/>
             <a:extLst>
               <a:ext uri="{FF2B5EF4-FFF2-40B4-BE49-F238E27FC236}">
-                <a16:creationId xmlns:a16="http://schemas.microsoft.com/office/drawing/2014/main" id="{26C74B0B-C1BD-3BDF-DDD4-F14731B05CEA}"/>
+                <a16:creationId xmlns:a16="http://schemas.microsoft.com/office/drawing/2014/main" id="{5B53656C-BDC1-EDB6-0266-ED4717C60E51}"/>
               </a:ext>
             </a:extLst>
           </p:cNvPr>
@@ -3836,7 +3836,7 @@
     </p:spTree>
     <p:extLst>
       <p:ext uri="{BB962C8B-B14F-4D97-AF65-F5344CB8AC3E}">
-        <p14:creationId xmlns:p14="http://schemas.microsoft.com/office/powerpoint/2010/main" val="3072089917"/>
+        <p14:creationId xmlns:p14="http://schemas.microsoft.com/office/powerpoint/2010/main" val="2347650168"/>
       </p:ext>
     </p:extLst>
   </p:cSld>
@@ -3960,7 +3960,7 @@
           <p:cNvPr id="2" name="テキスト ボックス 1">
             <a:extLst>
               <a:ext uri="{FF2B5EF4-FFF2-40B4-BE49-F238E27FC236}">
-                <a16:creationId xmlns:a16="http://schemas.microsoft.com/office/drawing/2014/main" id="{E348012D-2A12-2939-AECD-35311B85789F}"/>
+                <a16:creationId xmlns:a16="http://schemas.microsoft.com/office/drawing/2014/main" id="{2CC0F845-0842-5C0B-D006-25DD9B305DEF}"/>
               </a:ext>
             </a:extLst>
           </p:cNvPr>
@@ -4006,7 +4006,7 @@
           <p:cNvPr id="3" name="テキスト ボックス 2">
             <a:extLst>
               <a:ext uri="{FF2B5EF4-FFF2-40B4-BE49-F238E27FC236}">
-                <a16:creationId xmlns:a16="http://schemas.microsoft.com/office/drawing/2014/main" id="{0DF85704-71BA-6282-4A29-5D757A9B5F3E}"/>
+                <a16:creationId xmlns:a16="http://schemas.microsoft.com/office/drawing/2014/main" id="{BBB49BE7-2881-BC5D-166B-88BD7D167090}"/>
               </a:ext>
             </a:extLst>
           </p:cNvPr>
@@ -4046,7 +4046,7 @@
           <p:cNvPr id="4" name="テキスト ボックス 3">
             <a:extLst>
               <a:ext uri="{FF2B5EF4-FFF2-40B4-BE49-F238E27FC236}">
-                <a16:creationId xmlns:a16="http://schemas.microsoft.com/office/drawing/2014/main" id="{C0B212DC-18F4-751E-4C44-8F4E776C19AD}"/>
+                <a16:creationId xmlns:a16="http://schemas.microsoft.com/office/drawing/2014/main" id="{C46C81DE-0DEC-5F1F-D819-4C58F43E3A66}"/>
               </a:ext>
             </a:extLst>
           </p:cNvPr>
@@ -4110,7 +4110,7 @@
           <p:cNvPr id="5" name="テキスト ボックス 4">
             <a:extLst>
               <a:ext uri="{FF2B5EF4-FFF2-40B4-BE49-F238E27FC236}">
-                <a16:creationId xmlns:a16="http://schemas.microsoft.com/office/drawing/2014/main" id="{D06C0CC8-F57C-3518-C5D6-8F9218B1C84A}"/>
+                <a16:creationId xmlns:a16="http://schemas.microsoft.com/office/drawing/2014/main" id="{F884A589-EB6A-B48D-188F-1E478C55A6CC}"/>
               </a:ext>
             </a:extLst>
           </p:cNvPr>
@@ -4157,7 +4157,7 @@
             <a:hlinkClick r:id="" action="ppaction://media"/>
             <a:extLst>
               <a:ext uri="{FF2B5EF4-FFF2-40B4-BE49-F238E27FC236}">
-                <a16:creationId xmlns:a16="http://schemas.microsoft.com/office/drawing/2014/main" id="{331C3552-52BC-3491-EFD4-E283807DD4D8}"/>
+                <a16:creationId xmlns:a16="http://schemas.microsoft.com/office/drawing/2014/main" id="{891F18E8-2742-7260-39C1-BDDDF8E0F476}"/>
               </a:ext>
             </a:extLst>
           </p:cNvPr>
@@ -4192,7 +4192,7 @@
     </p:spTree>
     <p:extLst>
       <p:ext uri="{BB962C8B-B14F-4D97-AF65-F5344CB8AC3E}">
-        <p14:creationId xmlns:p14="http://schemas.microsoft.com/office/powerpoint/2010/main" val="1644961292"/>
+        <p14:creationId xmlns:p14="http://schemas.microsoft.com/office/powerpoint/2010/main" val="3893110926"/>
       </p:ext>
     </p:extLst>
   </p:cSld>
@@ -4316,7 +4316,7 @@
           <p:cNvPr id="2" name="テキスト ボックス 1">
             <a:extLst>
               <a:ext uri="{FF2B5EF4-FFF2-40B4-BE49-F238E27FC236}">
-                <a16:creationId xmlns:a16="http://schemas.microsoft.com/office/drawing/2014/main" id="{33E97656-0A38-B5EC-F183-F494CD76BFE3}"/>
+                <a16:creationId xmlns:a16="http://schemas.microsoft.com/office/drawing/2014/main" id="{5855103D-8599-6BC7-D9C6-DB5DBF25D24F}"/>
               </a:ext>
             </a:extLst>
           </p:cNvPr>
@@ -4362,7 +4362,7 @@
           <p:cNvPr id="3" name="テキスト ボックス 2">
             <a:extLst>
               <a:ext uri="{FF2B5EF4-FFF2-40B4-BE49-F238E27FC236}">
-                <a16:creationId xmlns:a16="http://schemas.microsoft.com/office/drawing/2014/main" id="{C01927AE-CBE3-2928-CEA4-BCE17F3F9AFA}"/>
+                <a16:creationId xmlns:a16="http://schemas.microsoft.com/office/drawing/2014/main" id="{07B590E0-D0B6-399A-C0D4-B233DB4A0006}"/>
               </a:ext>
             </a:extLst>
           </p:cNvPr>
@@ -4402,7 +4402,7 @@
           <p:cNvPr id="4" name="テキスト ボックス 3">
             <a:extLst>
               <a:ext uri="{FF2B5EF4-FFF2-40B4-BE49-F238E27FC236}">
-                <a16:creationId xmlns:a16="http://schemas.microsoft.com/office/drawing/2014/main" id="{79EF6725-0FCF-4EB9-D20E-840B62CB4973}"/>
+                <a16:creationId xmlns:a16="http://schemas.microsoft.com/office/drawing/2014/main" id="{23C18DCD-8FA7-9B02-9C21-F88C43CB2F3B}"/>
               </a:ext>
             </a:extLst>
           </p:cNvPr>
@@ -4497,7 +4497,7 @@
           <p:cNvPr id="5" name="テキスト ボックス 4">
             <a:extLst>
               <a:ext uri="{FF2B5EF4-FFF2-40B4-BE49-F238E27FC236}">
-                <a16:creationId xmlns:a16="http://schemas.microsoft.com/office/drawing/2014/main" id="{CEFAB849-6C76-03F3-9247-5347A6B4360B}"/>
+                <a16:creationId xmlns:a16="http://schemas.microsoft.com/office/drawing/2014/main" id="{A682DAED-C06D-02D6-6FFB-150224236CA2}"/>
               </a:ext>
             </a:extLst>
           </p:cNvPr>
@@ -4544,7 +4544,7 @@
             <a:hlinkClick r:id="" action="ppaction://media"/>
             <a:extLst>
               <a:ext uri="{FF2B5EF4-FFF2-40B4-BE49-F238E27FC236}">
-                <a16:creationId xmlns:a16="http://schemas.microsoft.com/office/drawing/2014/main" id="{8753B001-2083-49F4-6E17-2D42C6C8DC93}"/>
+                <a16:creationId xmlns:a16="http://schemas.microsoft.com/office/drawing/2014/main" id="{6C02395E-39D1-D222-7778-B383FFB1E758}"/>
               </a:ext>
             </a:extLst>
           </p:cNvPr>
@@ -4579,7 +4579,7 @@
     </p:spTree>
     <p:extLst>
       <p:ext uri="{BB962C8B-B14F-4D97-AF65-F5344CB8AC3E}">
-        <p14:creationId xmlns:p14="http://schemas.microsoft.com/office/powerpoint/2010/main" val="4293126109"/>
+        <p14:creationId xmlns:p14="http://schemas.microsoft.com/office/powerpoint/2010/main" val="252407403"/>
       </p:ext>
     </p:extLst>
   </p:cSld>
@@ -4703,7 +4703,7 @@
           <p:cNvPr id="2" name="テキスト ボックス 1">
             <a:extLst>
               <a:ext uri="{FF2B5EF4-FFF2-40B4-BE49-F238E27FC236}">
-                <a16:creationId xmlns:a16="http://schemas.microsoft.com/office/drawing/2014/main" id="{80F04CC7-E7E7-C6A1-06B3-470F88D19AD6}"/>
+                <a16:creationId xmlns:a16="http://schemas.microsoft.com/office/drawing/2014/main" id="{1FDD8A36-5D0D-2294-7888-E6D219D01577}"/>
               </a:ext>
             </a:extLst>
           </p:cNvPr>
@@ -4749,7 +4749,7 @@
           <p:cNvPr id="3" name="テキスト ボックス 2">
             <a:extLst>
               <a:ext uri="{FF2B5EF4-FFF2-40B4-BE49-F238E27FC236}">
-                <a16:creationId xmlns:a16="http://schemas.microsoft.com/office/drawing/2014/main" id="{F069D33D-C2D3-8F7C-7B85-84CA08BA9EFF}"/>
+                <a16:creationId xmlns:a16="http://schemas.microsoft.com/office/drawing/2014/main" id="{46079D93-73AE-1362-E42F-29D9B60E3303}"/>
               </a:ext>
             </a:extLst>
           </p:cNvPr>
@@ -4789,7 +4789,7 @@
           <p:cNvPr id="4" name="テキスト ボックス 3">
             <a:extLst>
               <a:ext uri="{FF2B5EF4-FFF2-40B4-BE49-F238E27FC236}">
-                <a16:creationId xmlns:a16="http://schemas.microsoft.com/office/drawing/2014/main" id="{713B58A7-9C51-F468-F7EE-3F238FB90084}"/>
+                <a16:creationId xmlns:a16="http://schemas.microsoft.com/office/drawing/2014/main" id="{6E367C93-27B9-486B-DD4A-317731984987}"/>
               </a:ext>
             </a:extLst>
           </p:cNvPr>
@@ -4899,7 +4899,7 @@
           <p:cNvPr id="5" name="テキスト ボックス 4">
             <a:extLst>
               <a:ext uri="{FF2B5EF4-FFF2-40B4-BE49-F238E27FC236}">
-                <a16:creationId xmlns:a16="http://schemas.microsoft.com/office/drawing/2014/main" id="{80F0A8C1-5CB2-970F-5CAA-F4AFC6C18C55}"/>
+                <a16:creationId xmlns:a16="http://schemas.microsoft.com/office/drawing/2014/main" id="{C2786014-63F2-D379-7361-E210E7278F73}"/>
               </a:ext>
             </a:extLst>
           </p:cNvPr>
@@ -4946,7 +4946,7 @@
             <a:hlinkClick r:id="" action="ppaction://media"/>
             <a:extLst>
               <a:ext uri="{FF2B5EF4-FFF2-40B4-BE49-F238E27FC236}">
-                <a16:creationId xmlns:a16="http://schemas.microsoft.com/office/drawing/2014/main" id="{F46EA38A-9240-5AA7-9346-BE877D50FDF5}"/>
+                <a16:creationId xmlns:a16="http://schemas.microsoft.com/office/drawing/2014/main" id="{64E4ECEB-CF4C-03EE-BC0A-917CA0F8B65B}"/>
               </a:ext>
             </a:extLst>
           </p:cNvPr>
@@ -4981,7 +4981,7 @@
     </p:spTree>
     <p:extLst>
       <p:ext uri="{BB962C8B-B14F-4D97-AF65-F5344CB8AC3E}">
-        <p14:creationId xmlns:p14="http://schemas.microsoft.com/office/powerpoint/2010/main" val="3816819698"/>
+        <p14:creationId xmlns:p14="http://schemas.microsoft.com/office/powerpoint/2010/main" val="3994082729"/>
       </p:ext>
     </p:extLst>
   </p:cSld>
@@ -5105,7 +5105,7 @@
           <p:cNvPr id="2" name="テキスト ボックス 1">
             <a:extLst>
               <a:ext uri="{FF2B5EF4-FFF2-40B4-BE49-F238E27FC236}">
-                <a16:creationId xmlns:a16="http://schemas.microsoft.com/office/drawing/2014/main" id="{3AEC8843-06B9-2A98-AC5C-E42E3A96F59F}"/>
+                <a16:creationId xmlns:a16="http://schemas.microsoft.com/office/drawing/2014/main" id="{E9C63536-6B5A-B945-B1BE-E243768780E7}"/>
               </a:ext>
             </a:extLst>
           </p:cNvPr>
@@ -5151,7 +5151,7 @@
           <p:cNvPr id="3" name="テキスト ボックス 2">
             <a:extLst>
               <a:ext uri="{FF2B5EF4-FFF2-40B4-BE49-F238E27FC236}">
-                <a16:creationId xmlns:a16="http://schemas.microsoft.com/office/drawing/2014/main" id="{56FA7C79-1EC3-0511-EE38-31447559EF02}"/>
+                <a16:creationId xmlns:a16="http://schemas.microsoft.com/office/drawing/2014/main" id="{855B3BEC-BD12-0B77-5825-D073DF821099}"/>
               </a:ext>
             </a:extLst>
           </p:cNvPr>
@@ -5191,7 +5191,7 @@
           <p:cNvPr id="4" name="テキスト ボックス 3">
             <a:extLst>
               <a:ext uri="{FF2B5EF4-FFF2-40B4-BE49-F238E27FC236}">
-                <a16:creationId xmlns:a16="http://schemas.microsoft.com/office/drawing/2014/main" id="{10558E81-0FE9-A4E3-173B-7C0D8EBAB616}"/>
+                <a16:creationId xmlns:a16="http://schemas.microsoft.com/office/drawing/2014/main" id="{FE52CA24-0726-FA39-02C0-194F9FF27D6C}"/>
               </a:ext>
             </a:extLst>
           </p:cNvPr>
@@ -5215,20 +5215,14 @@
           <a:lstStyle/>
           <a:p>
             <a:r>
-              <a:rPr kumimoji="1" lang="en-US" altLang="ja-JP" sz="2000">
+              <a:rPr kumimoji="1" lang="ja-JP" altLang="en-US" sz="2000">
                 <a:solidFill>
                   <a:srgbClr val="333333"/>
                 </a:solidFill>
                 <a:latin typeface="Arial" panose="020B0604020202020204" pitchFamily="34" charset="0"/>
               </a:rPr>
-              <a:t>Set confirmed custom domain</a:t>
-            </a:r>
-            <a:endParaRPr kumimoji="1" lang="ja-JP" altLang="en-US" sz="2000">
-              <a:solidFill>
-                <a:srgbClr val="333333"/>
-              </a:solidFill>
-              <a:latin typeface="Arial" panose="020B0604020202020204" pitchFamily="34" charset="0"/>
-            </a:endParaRPr>
+              <a:t>直近のコミットでは、実装の見直しと継続的な改善が行われました。</a:t>
+            </a:r>
           </a:p>
         </p:txBody>
       </p:sp>
@@ -5237,7 +5231,7 @@
           <p:cNvPr id="5" name="テキスト ボックス 4">
             <a:extLst>
               <a:ext uri="{FF2B5EF4-FFF2-40B4-BE49-F238E27FC236}">
-                <a16:creationId xmlns:a16="http://schemas.microsoft.com/office/drawing/2014/main" id="{8364428A-3521-5E1B-5D50-5E7367D3A983}"/>
+                <a16:creationId xmlns:a16="http://schemas.microsoft.com/office/drawing/2014/main" id="{D2AEBDFE-352F-8191-7897-8E871EC99B51}"/>
               </a:ext>
             </a:extLst>
           </p:cNvPr>
@@ -5284,7 +5278,7 @@
             <a:hlinkClick r:id="" action="ppaction://media"/>
             <a:extLst>
               <a:ext uri="{FF2B5EF4-FFF2-40B4-BE49-F238E27FC236}">
-                <a16:creationId xmlns:a16="http://schemas.microsoft.com/office/drawing/2014/main" id="{9B2086F2-75B8-28C1-7E3B-7F8ADDEF9863}"/>
+                <a16:creationId xmlns:a16="http://schemas.microsoft.com/office/drawing/2014/main" id="{BEA29B2D-F380-7763-C36B-584B7D9B0077}"/>
               </a:ext>
             </a:extLst>
           </p:cNvPr>
@@ -5319,7 +5313,7 @@
     </p:spTree>
     <p:extLst>
       <p:ext uri="{BB962C8B-B14F-4D97-AF65-F5344CB8AC3E}">
-        <p14:creationId xmlns:p14="http://schemas.microsoft.com/office/powerpoint/2010/main" val="3310741698"/>
+        <p14:creationId xmlns:p14="http://schemas.microsoft.com/office/powerpoint/2010/main" val="2028363769"/>
       </p:ext>
     </p:extLst>
   </p:cSld>
@@ -5362,7 +5356,7 @@
                                   <p:childTnLst>
                                     <p:cmd type="call" cmd="playFrom(0.0)">
                                       <p:cBhvr>
-                                        <p:cTn id="6" dur="6451" fill="hold"/>
+                                        <p:cTn id="6" dur="6076" fill="hold"/>
                                         <p:tgtEl>
                                           <p:spTgt spid="6"/>
                                         </p:tgtEl>
@@ -5443,7 +5437,7 @@
           <p:cNvPr id="2" name="テキスト ボックス 1">
             <a:extLst>
               <a:ext uri="{FF2B5EF4-FFF2-40B4-BE49-F238E27FC236}">
-                <a16:creationId xmlns:a16="http://schemas.microsoft.com/office/drawing/2014/main" id="{F11553B7-03A9-7F4F-501B-6F21ABC126B3}"/>
+                <a16:creationId xmlns:a16="http://schemas.microsoft.com/office/drawing/2014/main" id="{9D27FBF4-539A-31EE-26FD-7772B076C987}"/>
               </a:ext>
             </a:extLst>
           </p:cNvPr>
@@ -5489,7 +5483,7 @@
           <p:cNvPr id="3" name="テキスト ボックス 2">
             <a:extLst>
               <a:ext uri="{FF2B5EF4-FFF2-40B4-BE49-F238E27FC236}">
-                <a16:creationId xmlns:a16="http://schemas.microsoft.com/office/drawing/2014/main" id="{C572DA2F-DE75-98BF-E62B-8FFE54E99F0F}"/>
+                <a16:creationId xmlns:a16="http://schemas.microsoft.com/office/drawing/2014/main" id="{2546ED64-5057-F4F2-C5EC-F36457CBAE41}"/>
               </a:ext>
             </a:extLst>
           </p:cNvPr>
@@ -5529,7 +5523,7 @@
           <p:cNvPr id="4" name="テキスト ボックス 3">
             <a:extLst>
               <a:ext uri="{FF2B5EF4-FFF2-40B4-BE49-F238E27FC236}">
-                <a16:creationId xmlns:a16="http://schemas.microsoft.com/office/drawing/2014/main" id="{A8745AF1-3519-350E-B56A-D6F9F91E5EDC}"/>
+                <a16:creationId xmlns:a16="http://schemas.microsoft.com/office/drawing/2014/main" id="{1D0FDFEC-7A4E-CDAA-4968-F92AAEECA943}"/>
               </a:ext>
             </a:extLst>
           </p:cNvPr>
@@ -5594,7 +5588,7 @@
           <p:cNvPr id="5" name="テキスト ボックス 4">
             <a:extLst>
               <a:ext uri="{FF2B5EF4-FFF2-40B4-BE49-F238E27FC236}">
-                <a16:creationId xmlns:a16="http://schemas.microsoft.com/office/drawing/2014/main" id="{13435CEF-47DC-AD7D-5673-EE045BEEE0BF}"/>
+                <a16:creationId xmlns:a16="http://schemas.microsoft.com/office/drawing/2014/main" id="{38ACFE38-798D-3FCE-52BE-A9B714434328}"/>
               </a:ext>
             </a:extLst>
           </p:cNvPr>
@@ -5641,7 +5635,7 @@
             <a:hlinkClick r:id="" action="ppaction://media"/>
             <a:extLst>
               <a:ext uri="{FF2B5EF4-FFF2-40B4-BE49-F238E27FC236}">
-                <a16:creationId xmlns:a16="http://schemas.microsoft.com/office/drawing/2014/main" id="{D10BA1BA-65BF-FF3C-6BDC-A050C455F998}"/>
+                <a16:creationId xmlns:a16="http://schemas.microsoft.com/office/drawing/2014/main" id="{CF13F64C-18D3-A34E-D8E2-35B365E9869B}"/>
               </a:ext>
             </a:extLst>
           </p:cNvPr>
@@ -5676,7 +5670,7 @@
     </p:spTree>
     <p:extLst>
       <p:ext uri="{BB962C8B-B14F-4D97-AF65-F5344CB8AC3E}">
-        <p14:creationId xmlns:p14="http://schemas.microsoft.com/office/powerpoint/2010/main" val="3984824095"/>
+        <p14:creationId xmlns:p14="http://schemas.microsoft.com/office/powerpoint/2010/main" val="4269636105"/>
       </p:ext>
     </p:extLst>
   </p:cSld>
